--- a/02_BrasBeta/02_BrasBeta.pptx
+++ b/02_BrasBeta/02_BrasBeta.pptx
@@ -225,7 +225,7 @@
           <a:p>
             <a:fld id="{D157349C-AD05-44FA-B790-D9BBD62C4832}" type="datetimeFigureOut">
               <a:rPr lang="fr-FR" smtClean="0"/>
-              <a:t>10/10/2025</a:t>
+              <a:t>20/04/2026</a:t>
             </a:fld>
             <a:endParaRPr lang="fr-FR"/>
           </a:p>
@@ -751,7 +751,7 @@
           <a:p>
             <a:fld id="{CCF538C2-C309-4752-87A7-D2071D6CAC7F}" type="datetime1">
               <a:rPr lang="fr-FR" smtClean="0"/>
-              <a:t>10/10/2025</a:t>
+              <a:t>20/04/2026</a:t>
             </a:fld>
             <a:endParaRPr lang="fr-FR"/>
           </a:p>
@@ -956,7 +956,7 @@
           <a:p>
             <a:fld id="{F926C4FD-C1E6-452C-A858-BFBBC7496631}" type="datetime1">
               <a:rPr lang="fr-FR" smtClean="0"/>
-              <a:t>10/10/2025</a:t>
+              <a:t>20/04/2026</a:t>
             </a:fld>
             <a:endParaRPr lang="fr-FR"/>
           </a:p>
@@ -1212,7 +1212,7 @@
           <a:p>
             <a:fld id="{CEF75A8D-5F26-4754-844B-E2D9F6FC4950}" type="datetime1">
               <a:rPr lang="fr-FR" smtClean="0"/>
-              <a:t>10/10/2025</a:t>
+              <a:t>20/04/2026</a:t>
             </a:fld>
             <a:endParaRPr lang="fr-FR"/>
           </a:p>
@@ -1386,7 +1386,7 @@
           <a:p>
             <a:fld id="{FE352A31-E2A5-4F8A-BDFE-A9BA369B67E9}" type="datetime1">
               <a:rPr lang="fr-FR" smtClean="0"/>
-              <a:t>10/10/2025</a:t>
+              <a:t>20/04/2026</a:t>
             </a:fld>
             <a:endParaRPr lang="fr-FR"/>
           </a:p>
@@ -1748,7 +1748,7 @@
           <a:p>
             <a:fld id="{F1707E18-E4F4-4E6D-951C-B01FC69E66C0}" type="datetime1">
               <a:rPr lang="fr-FR" smtClean="0"/>
-              <a:t>10/10/2025</a:t>
+              <a:t>20/04/2026</a:t>
             </a:fld>
             <a:endParaRPr lang="fr-FR"/>
           </a:p>
@@ -2023,7 +2023,7 @@
           <a:p>
             <a:fld id="{93E4B9C8-F394-498B-8C66-049FACC1ED86}" type="datetime1">
               <a:rPr lang="fr-FR" smtClean="0"/>
-              <a:t>10/10/2025</a:t>
+              <a:t>20/04/2026</a:t>
             </a:fld>
             <a:endParaRPr lang="fr-FR"/>
           </a:p>
@@ -2402,7 +2402,7 @@
           <a:p>
             <a:fld id="{35950896-C41B-455D-9FAE-80943DD0CAEF}" type="datetime1">
               <a:rPr lang="fr-FR" smtClean="0"/>
-              <a:t>10/10/2025</a:t>
+              <a:t>20/04/2026</a:t>
             </a:fld>
             <a:endParaRPr lang="fr-FR"/>
           </a:p>
@@ -2520,7 +2520,7 @@
           <a:p>
             <a:fld id="{2BE2B735-22CE-433C-8BA6-DF0B28588E1F}" type="datetime1">
               <a:rPr lang="fr-FR" smtClean="0"/>
-              <a:t>10/10/2025</a:t>
+              <a:t>20/04/2026</a:t>
             </a:fld>
             <a:endParaRPr lang="fr-FR"/>
           </a:p>
@@ -2694,7 +2694,7 @@
           <a:p>
             <a:fld id="{5B475E59-9936-4413-84C5-14169665FDED}" type="datetime1">
               <a:rPr lang="fr-FR" smtClean="0"/>
-              <a:t>10/10/2025</a:t>
+              <a:t>20/04/2026</a:t>
             </a:fld>
             <a:endParaRPr lang="fr-FR"/>
           </a:p>
@@ -3051,7 +3051,7 @@
           <a:p>
             <a:fld id="{42662320-E9E6-45B0-8B93-5727AA5FFC46}" type="datetime1">
               <a:rPr lang="fr-FR" smtClean="0"/>
-              <a:t>10/10/2025</a:t>
+              <a:t>20/04/2026</a:t>
             </a:fld>
             <a:endParaRPr lang="fr-FR"/>
           </a:p>
@@ -3436,7 +3436,7 @@
           <a:p>
             <a:fld id="{9A545382-D50F-43E8-AFFD-788FD552C87C}" type="datetime1">
               <a:rPr lang="fr-FR" smtClean="0"/>
-              <a:t>10/10/2025</a:t>
+              <a:t>20/04/2026</a:t>
             </a:fld>
             <a:endParaRPr lang="fr-FR"/>
           </a:p>
@@ -3740,7 +3740,7 @@
           <a:p>
             <a:fld id="{4F030BD8-D1C7-406A-AB04-4944ABBF0A3E}" type="datetime1">
               <a:rPr lang="fr-FR" smtClean="0"/>
-              <a:t>10/10/2025</a:t>
+              <a:t>20/04/2026</a:t>
             </a:fld>
             <a:endParaRPr lang="fr-FR" dirty="0"/>
           </a:p>
@@ -7437,8 +7437,8 @@
           </mc:Fallback>
         </mc:AlternateContent>
       </p:grpSp>
-      <mc:AlternateContent xmlns:mc="http://schemas.openxmlformats.org/markup-compatibility/2006">
-        <mc:Choice xmlns:a14="http://schemas.microsoft.com/office/drawing/2010/main" Requires="a14">
+      <mc:AlternateContent xmlns:mc="http://schemas.openxmlformats.org/markup-compatibility/2006" xmlns:a14="http://schemas.microsoft.com/office/drawing/2010/main">
+        <mc:Choice Requires="a14">
           <p:sp>
             <p:nvSpPr>
               <p:cNvPr id="46" name="Espace réservé du contenu 2">
@@ -8351,7 +8351,7 @@
             </p:txBody>
           </p:sp>
         </mc:Choice>
-        <mc:Fallback>
+        <mc:Fallback xmlns="">
           <p:sp>
             <p:nvSpPr>
               <p:cNvPr id="46" name="Espace réservé du contenu 2">
@@ -8681,7 +8681,10 @@
           <a:bodyPr/>
           <a:lstStyle/>
           <a:p>
-            <a:endParaRPr lang="fr-FR"/>
+            <a:r>
+              <a:rPr lang="fr-FR" dirty="0"/>
+              <a:t>Modèle de comportement</a:t>
+            </a:r>
           </a:p>
         </p:txBody>
       </p:sp>
@@ -8706,7 +8709,17 @@
           <a:bodyPr/>
           <a:lstStyle/>
           <a:p>
-            <a:endParaRPr lang="fr-FR"/>
+            <a:pPr>
+              <a:buFont typeface="Wingdings" panose="05000000000000000000" pitchFamily="2" charset="2"/>
+              <a:buChar char="q"/>
+            </a:pPr>
+            <a:r>
+              <a:rPr lang="fr-FR" dirty="0"/>
+              <a:t>Premier ordre intégré</a:t>
+            </a:r>
+          </a:p>
+          <a:p>
+            <a:endParaRPr lang="fr-FR" dirty="0"/>
           </a:p>
         </p:txBody>
       </p:sp>
